--- a/docs/presentations/EngD_Update_8_Final_Review_September2026_revB.pptx
+++ b/docs/presentations/EngD_Update_8_Final_Review_September2026_revB.pptx
@@ -1127,7 +1127,7 @@
           <a:p>
             <a:r>
               <a:rPr lang="en-US" dirty="0"/>
-              <a:t>70 sec. Calibrated status: prepared, not fielded — the build and ethics coverage are done, recruitment starts on protocol sign-off. Calibrated claims: it evaluates the combined intervention as a package; component isolation and the framing contrast need the later three-arm study. Name the early-exit capture question as a protocol item yourself — do not wait for the panel to find it.</a:t>
+              <a:t>70 sec. Status: in the field since August 2026, nearing completion, inside the approved ethics period. Calibrated claims: it evaluates the combined intervention as a package; component isolation and the framing contrast need the later three-arm study. State yourself that the analysis plan will be fixed with the supervisor before the data are analysed, and name the early-exit capture question — do not wait for the panel to find either.</a:t>
             </a:r>
             <a:endParaRPr lang="en-US" dirty="0"/>
           </a:p>
@@ -1303,7 +1303,7 @@
           <a:p>
             <a:r>
               <a:rPr lang="en-US" dirty="0"/>
-              <a:t>50 sec. Three beats against two clocks. Be explicit about the real dependencies: two supervisor decisions and recruitment timing. The ethics expiry bounds fieldwork, not thesis submission — but late fieldwork compresses everything after it.</a:t>
+              <a:t>50 sec. Three beats against two clocks. The field window is already running and closes shortly; the real dependencies now are the analysis plan, the supervisor's Paper-3 venue decision, and the documentary records. The ethics expiry bounds fieldwork, not thesis submission.</a:t>
             </a:r>
             <a:endParaRPr lang="en-US" dirty="0"/>
           </a:p>
@@ -3563,7 +3563,7 @@
                 <a:ea typeface="Calibri" pitchFamily="34" charset="-122"/>
                 <a:cs typeface="Calibri" pitchFamily="34" charset="-120"/>
               </a:rPr>
-              <a:t>Changes in cohort, setting, delivery and input modality across stages prevent causal isolation. Stage 3B next evaluates the combined adaptive design; it does not by itself isolate the framing contrast.</a:t>
+              <a:t>Changes in cohort, setting, delivery and input modality across stages prevent causal isolation. Stage 3B — in the field since August 2026 — evaluates the combined adaptive design; it does not by itself isolate the framing contrast.</a:t>
             </a:r>
             <a:endParaRPr lang="en-US" sz="1250" dirty="0"/>
           </a:p>
@@ -6840,7 +6840,7 @@
                 <a:ea typeface="Cambria" pitchFamily="34" charset="-122"/>
                 <a:cs typeface="Cambria" pitchFamily="34" charset="-120"/>
               </a:rPr>
-              <a:t>Stage 3B: prepared, pending protocol sign-off</a:t>
+              <a:t>Stage 3B: in the field, nearing completion</a:t>
             </a:r>
             <a:endParaRPr lang="en-US" sz="3100" dirty="0"/>
           </a:p>
@@ -6879,7 +6879,7 @@
                 <a:ea typeface="Calibri" pitchFamily="34" charset="-122"/>
                 <a:cs typeface="Calibri" pitchFamily="34" charset="-120"/>
               </a:rPr>
-              <a:t>First field evaluation of the Chapter 7 adaptive-learning framework — an exploratory randomised evaluation</a:t>
+              <a:t>Exploratory randomised evaluation of the Chapter 7 adaptive-learning framework — running since August 2026</a:t>
             </a:r>
             <a:endParaRPr lang="en-US" sz="1400" dirty="0"/>
           </a:p>
@@ -7120,7 +7120,7 @@
                 <a:ea typeface="Calibri" pitchFamily="34" charset="-122"/>
                 <a:cs typeface="Calibri" pitchFamily="34" charset="-120"/>
               </a:rPr>
-              <a:t>Window   </a:t>
+              <a:t>Status   </a:t>
             </a:r>
             <a:pPr indent="0" marL="0">
               <a:lnSpc>
@@ -7137,7 +7137,7 @@
                 <a:ea typeface="Calibri" pitchFamily="34" charset="-122"/>
                 <a:cs typeface="Calibri" pitchFamily="34" charset="-120"/>
               </a:rPr>
-              <a:t>~4 weeks; recruitment must open by late September so the window closes inside the approved ethics period (to 30 Oct 2026).</a:t>
+              <a:t>Deployment began August 2026 (author-reported) and is nearing completion; the window closes inside the approved ethics period (to 30 Oct 2026). Data arrive as one-file JSON exports, archived as-received.</a:t>
             </a:r>
             <a:endParaRPr lang="en-US" sz="1250" dirty="0"/>
           </a:p>
@@ -7179,7 +7179,7 @@
                 <a:ea typeface="Calibri" pitchFamily="34" charset="-122"/>
                 <a:cs typeface="Calibri" pitchFamily="34" charset="-120"/>
               </a:rPr>
-              <a:t>Protocol gate   </a:t>
+              <a:t>Before analysis   </a:t>
             </a:r>
             <a:pPr indent="0" marL="0">
               <a:lnSpc>
@@ -7196,7 +7196,7 @@
                 <a:ea typeface="Calibri" pitchFamily="34" charset="-122"/>
                 <a:cs typeface="Calibri" pitchFamily="34" charset="-120"/>
               </a:rPr>
-              <a:t>Supervisor sign-off. The protocol fixes the primary outcome, sample-size rationale, missing-data handling, and capture of early exits — end-screen questionnaires alone would miss early stoppers, the group most relevant to non-return.</a:t>
+              <a:t>With fieldwork nearly closed, the analysis plan is to be fixed with the supervisor before the data are analysed: primary outcome, precision framing, missing-data handling, and treatment of early exits (end-screen questionnaires alone miss early stoppers).</a:t>
             </a:r>
             <a:endParaRPr lang="en-US" sz="1250" dirty="0"/>
           </a:p>
@@ -7663,7 +7663,7 @@
                 <a:ea typeface="Calibri" pitchFamily="34" charset="-122"/>
                 <a:cs typeface="Calibri" pitchFamily="34" charset="-120"/>
               </a:rPr>
-              <a:t>Protocol sign-off → recruitment (by late Sep) → ~4-week window</a:t>
+              <a:t>Window close and data cut-off; exports archived as-received</a:t>
             </a:r>
             <a:endParaRPr lang="en-US" sz="1150" dirty="0"/>
           </a:p>
@@ -7687,7 +7687,7 @@
                 <a:ea typeface="Calibri" pitchFamily="34" charset="-122"/>
                 <a:cs typeface="Calibri" pitchFamily="34" charset="-120"/>
               </a:rPr>
-              <a:t>Results analysis and interpretation → §8.8 + programme diary</a:t>
+              <a:t>Analysis plan fixed with supervisor, then analysis and interpretation → §8.8 + programme diary</a:t>
             </a:r>
             <a:endParaRPr lang="en-US" sz="1150" dirty="0"/>
           </a:p>
@@ -8454,7 +8454,7 @@
                 <a:ea typeface="Calibri" pitchFamily="34" charset="-122"/>
                 <a:cs typeface="Calibri" pitchFamily="34" charset="-120"/>
               </a:rPr>
-              <a:t>By late September</a:t>
+              <a:t>Now – late September</a:t>
             </a:r>
             <a:endParaRPr lang="en-US" sz="1550" dirty="0"/>
           </a:p>
@@ -8522,7 +8522,7 @@
                 <a:ea typeface="Calibri" pitchFamily="34" charset="-122"/>
                 <a:cs typeface="Calibri" pitchFamily="34" charset="-120"/>
               </a:rPr>
-              <a:t>Supervisor decisions: Stage-3B protocol; Paper-3 venue</a:t>
+              <a:t>Stage-3B window closes; data cut-off; exports archived</a:t>
             </a:r>
             <a:endParaRPr lang="en-US" sz="1200" dirty="0"/>
           </a:p>
@@ -8546,7 +8546,7 @@
                 <a:ea typeface="Calibri" pitchFamily="34" charset="-122"/>
                 <a:cs typeface="Calibri" pitchFamily="34" charset="-120"/>
               </a:rPr>
-              <a:t>Recruitment opens — latest start for a 4-week window inside the ethics period</a:t>
+              <a:t>Analysis plan fixed with supervisor before analysis</a:t>
             </a:r>
             <a:endParaRPr lang="en-US" sz="1200" dirty="0"/>
           </a:p>
@@ -8759,7 +8759,7 @@
                 <a:ea typeface="Calibri" pitchFamily="34" charset="-122"/>
                 <a:cs typeface="Calibri" pitchFamily="34" charset="-120"/>
               </a:rPr>
-              <a:t>Stage-3B window runs; data cut-off at window close</a:t>
+              <a:t>Stage-3B analysis → §8.8 + programme diary</a:t>
             </a:r>
             <a:endParaRPr lang="en-US" sz="1200" dirty="0"/>
           </a:p>
@@ -8973,7 +8973,7 @@
                 <a:ea typeface="Calibri" pitchFamily="34" charset="-122"/>
                 <a:cs typeface="Calibri" pitchFamily="34" charset="-120"/>
               </a:rPr>
-              <a:t>Analysis (~1 week) → §8.8 + programme diary</a:t>
+              <a:t>Abstract rewrite; final sweeps; ToC/LoF/LoT fields</a:t>
             </a:r>
             <a:endParaRPr lang="en-US" sz="1200" dirty="0"/>
           </a:p>
@@ -8997,7 +8997,7 @@
                 <a:ea typeface="Calibri" pitchFamily="34" charset="-122"/>
                 <a:cs typeface="Calibri" pitchFamily="34" charset="-120"/>
               </a:rPr>
-              <a:t>Abstract rewrite; final sweeps; ToC/LoF/LoT fields</a:t>
+              <a:t>Paper-3 submission on the supervisor's venue decision</a:t>
             </a:r>
             <a:endParaRPr lang="en-US" sz="1200" dirty="0"/>
           </a:p>
@@ -9082,7 +9082,7 @@
                 <a:ea typeface="Calibri" pitchFamily="34" charset="-122"/>
                 <a:cs typeface="Calibri" pitchFamily="34" charset="-120"/>
               </a:rPr>
-              <a:t>Two clocks: the ethics approval period ends 30 October 2026 and bounds Stage-3B fieldwork; the thesis submission target is October 2026. Slippage in recruitment compresses analysis and write-up.</a:t>
+              <a:t>Two clocks: the ethics approval period ends 30 October 2026 and bounds Stage-3B fieldwork (the running window sits inside it); the thesis submission target is October 2026.</a:t>
             </a:r>
             <a:endParaRPr lang="en-US" sz="1300" dirty="0"/>
           </a:p>

--- a/docs/presentations/EngD_Update_8_Final_Review_September2026_revB.pptx
+++ b/docs/presentations/EngD_Update_8_Final_Review_September2026_revB.pptx
@@ -687,7 +687,7 @@
           <a:p>
             <a:r>
               <a:rPr lang="en-US" dirty="0"/>
-              <a:t>70 sec. Walk the three stages: the survey that surfaced the phenomenon; the eight-week gamified deployment; the decoupled deployment whose contrast motivates — but does not prove — the framing account. Note the defined Stage-3 endpoint: end-of-window participation, 112 of 120, returners counted as participating — not uninterrupted retention.</a:t>
+              <a:t>70 sec. Walk the three stages: the survey that surfaced the phenomenon; the eight-week gamified deployment; the decoupled deployment whose contrast motivates — but does not prove — the framing account. Note the defined Stage-3 endpoint: end-of-window participation, 112 of 120, returners counted as participating — not uninterrupted retention. If asked why Stage 3 has two parts: 3A tested removing the verdict; 3B tests measurement made survivable by design; separate labelled collections keep the reported 3A record untouched.</a:t>
             </a:r>
             <a:endParaRPr lang="en-US" dirty="0"/>
           </a:p>
@@ -1127,7 +1127,7 @@
           <a:p>
             <a:r>
               <a:rPr lang="en-US" dirty="0"/>
-              <a:t>70 sec. Status: in the field since August 2026, nearing completion, inside the approved ethics period. Calibrated claims: it evaluates the combined intervention as a package; component isolation and the framing contrast need the later three-arm study. State yourself that the analysis plan will be fixed with the supervisor before the data are analysed, and name the early-exit capture question — do not wait for the panel to find either.</a:t>
+              <a:t>75 sec. Open with the why: 3A established that engagement survives when the verdict is removed — but that is avoidance, not a solution. 3B reintroduces measurement made survivable by design, as a separately labelled collection so the reported 3A record stays untouched. Then status: in the field since August, nearing completion; the primary outcome was pre-specified in the protocol on 9 August, before recruitment; the analysis plan is confirmed with the supervisor before analysis. It evaluates the combined intervention as a package — component isolation and the framing contrast need the later three-arm study.</a:t>
             </a:r>
             <a:endParaRPr lang="en-US" dirty="0"/>
           </a:p>
@@ -3343,7 +3343,7 @@
                 <a:ea typeface="Calibri" pitchFamily="34" charset="-122"/>
                 <a:cs typeface="Calibri" pitchFamily="34" charset="-120"/>
               </a:rPr>
-              <a:t>S3</a:t>
+              <a:t>S3A</a:t>
             </a:r>
             <a:endParaRPr lang="en-US" sz="1700" dirty="0"/>
           </a:p>
@@ -6879,7 +6879,7 @@
                 <a:ea typeface="Calibri" pitchFamily="34" charset="-122"/>
                 <a:cs typeface="Calibri" pitchFamily="34" charset="-120"/>
               </a:rPr>
-              <a:t>Exploratory randomised evaluation of the Chapter 7 adaptive-learning framework — running since August 2026</a:t>
+              <a:t>Why Stage 3 split into 3A and 3B — and where 3B stands (running since August 2026)</a:t>
             </a:r>
             <a:endParaRPr lang="en-US" sz="1400" dirty="0"/>
           </a:p>
@@ -6974,7 +6974,7 @@
         </p:nvSpPr>
         <p:spPr>
           <a:xfrm>
-            <a:off x="502920" y="2889504"/>
+            <a:off x="502920" y="2816352"/>
             <a:ext cx="6949440" cy="859536"/>
           </a:xfrm>
           <a:prstGeom prst="rect">
@@ -7002,7 +7002,7 @@
                 <a:ea typeface="Calibri" pitchFamily="34" charset="-122"/>
                 <a:cs typeface="Calibri" pitchFamily="34" charset="-120"/>
               </a:rPr>
-              <a:t>Design   </a:t>
+              <a:t>Why a separate stage   </a:t>
             </a:r>
             <a:pPr indent="0" marL="0">
               <a:lnSpc>
@@ -7019,7 +7019,7 @@
                 <a:ea typeface="Calibri" pitchFamily="34" charset="-122"/>
                 <a:cs typeface="Calibri" pitchFamily="34" charset="-120"/>
               </a:rPr>
-              <a:t>Exploratory two-arm randomised comparison of the combined intervention (adaptive rule-agent + trajectory + coaching vs static difficulty), silently assigned; target N ≥ 40. Estimates the combined effect — it does not isolate components or the framing contrast.</a:t>
+              <a:t>Stage 3A removed the clinical verdict and engagement survived — avoidance, not a solution. Stage 3B reintroduces gentle, trajectory-framed measurement to test whether the Chapter 7 design makes measurement survivable — a separately labelled collection, so the reported 3A record is never touched.</a:t>
             </a:r>
             <a:endParaRPr lang="en-US" sz="1250" dirty="0"/>
           </a:p>
@@ -7033,7 +7033,7 @@
         </p:nvSpPr>
         <p:spPr>
           <a:xfrm>
-            <a:off x="502920" y="3749040"/>
+            <a:off x="502920" y="3675888"/>
             <a:ext cx="6949440" cy="859536"/>
           </a:xfrm>
           <a:prstGeom prst="rect">
@@ -7061,7 +7061,7 @@
                 <a:ea typeface="Calibri" pitchFamily="34" charset="-122"/>
                 <a:cs typeface="Calibri" pitchFamily="34" charset="-120"/>
               </a:rPr>
-              <a:t>Build   </a:t>
+              <a:t>Design   </a:t>
             </a:r>
             <a:pPr indent="0" marL="0">
               <a:lnSpc>
@@ -7078,7 +7078,7 @@
                 <a:ea typeface="Calibri" pitchFamily="34" charset="-122"/>
                 <a:cs typeface="Calibri" pitchFamily="34" charset="-120"/>
               </a:rPr>
-              <a:t>v3.0 bilingual (繁中/EN), smoke-tested: in-build consent citing the approval, D1/D2 + framework items, one-file JSON export, resume-on-reload, no external calls in play.</a:t>
+              <a:t>Exploratory two-arm randomised comparison (adaptive rule-agent + trajectory + coaching vs static difficulty), silently assigned in the v3.0 bilingual build; target N ≥ 40. Estimates the combined effect — no component or framing isolation.</a:t>
             </a:r>
             <a:endParaRPr lang="en-US" sz="1250" dirty="0"/>
           </a:p>
@@ -7092,7 +7092,7 @@
         </p:nvSpPr>
         <p:spPr>
           <a:xfrm>
-            <a:off x="502920" y="4608576"/>
+            <a:off x="502920" y="4535424"/>
             <a:ext cx="6949440" cy="859536"/>
           </a:xfrm>
           <a:prstGeom prst="rect">
@@ -7137,7 +7137,7 @@
                 <a:ea typeface="Calibri" pitchFamily="34" charset="-122"/>
                 <a:cs typeface="Calibri" pitchFamily="34" charset="-120"/>
               </a:rPr>
-              <a:t>Deployment began August 2026 (author-reported) and is nearing completion; the window closes inside the approved ethics period (to 30 Oct 2026). Data arrive as one-file JSON exports, archived as-received.</a:t>
+              <a:t>In the field since August 2026 (author-reported), nearing completion; the window closes inside the approved ethics period (to 30 Oct 2026). In-build consent; data arrive as one-file JSON exports, archived as-received.</a:t>
             </a:r>
             <a:endParaRPr lang="en-US" sz="1250" dirty="0"/>
           </a:p>
@@ -7151,7 +7151,7 @@
         </p:nvSpPr>
         <p:spPr>
           <a:xfrm>
-            <a:off x="502920" y="5468112"/>
+            <a:off x="502920" y="5394960"/>
             <a:ext cx="6949440" cy="859536"/>
           </a:xfrm>
           <a:prstGeom prst="rect">
@@ -7196,7 +7196,7 @@
                 <a:ea typeface="Calibri" pitchFamily="34" charset="-122"/>
                 <a:cs typeface="Calibri" pitchFamily="34" charset="-120"/>
               </a:rPr>
-              <a:t>With fieldwork nearly closed, the analysis plan is to be fixed with the supervisor before the data are analysed: primary outcome, precision framing, missing-data handling, and treatment of early exits (end-screen questionnaires alone miss early stoppers).</a:t>
+              <a:t>Analysis plan confirmed with the supervisor before the data are analysed: primary outcome (pre-specified in the protocol on 9 Aug 2026, before recruitment), missing-data handling, and treatment of early exits.</a:t>
             </a:r>
             <a:endParaRPr lang="en-US" sz="1250" dirty="0"/>
           </a:p>

--- a/docs/presentations/EngD_Update_8_Final_Review_September2026_revB.pptx
+++ b/docs/presentations/EngD_Update_8_Final_Review_September2026_revB.pptx
@@ -687,7 +687,7 @@
           <a:p>
             <a:r>
               <a:rPr lang="en-US" dirty="0"/>
-              <a:t>70 sec. Walk the three stages: the survey that surfaced the phenomenon; the eight-week gamified deployment; the decoupled deployment whose contrast motivates — but does not prove — the framing account. Note the defined Stage-3 endpoint: end-of-window participation, 112 of 120, returners counted as participating — not uninterrupted retention. If asked why Stage 3 has two parts: 3A tested removing the verdict; 3B tests measurement made survivable by design; separate labelled collections keep the reported 3A record untouched.</a:t>
+              <a:t>70 sec. Walk the three stages: the survey that surfaced the phenomenon; the eight-week gamified deployment; the decoupled deployment whose contrast motivates — but does not prove — the framing account. Note the defined Stage-3 endpoint: end-of-window participation, 112 of 120, returners counted as participating — not uninterrupted retention. If asked why Stage 3 has two parts: 3A tested removing the verdict; 3B tests measurement made survivable by design; separate labelled collections keep the reported 3A record untouched. Be upfront that the August collection used the 3A build and the 3B fielding decision is with the supervisor.</a:t>
             </a:r>
             <a:endParaRPr lang="en-US" dirty="0"/>
           </a:p>
@@ -1127,7 +1127,7 @@
           <a:p>
             <a:r>
               <a:rPr lang="en-US" dirty="0"/>
-              <a:t>75 sec. Open with the why: 3A established that engagement survives when the verdict is removed — but that is avoidance, not a solution. 3B reintroduces measurement made survivable by design, as a separately labelled collection so the reported 3A record stays untouched. Then status: in the field since August, nearing completion; the primary outcome was pre-specified in the protocol on 9 August, before recruitment; the analysis plan is confirmed with the supervisor before analysis. It evaluates the combined intervention as a package — component isolation and the framing contrast need the later three-arm study.</a:t>
+              <a:t>75 sec. Open with the why: 3A removed the verdict and engagement survived — avoidance, not a solution; 3B reintroduces measurement made survivable by design. Then the honest status: the v3.0 build is ready and its primary outcome was pre-specified on 9 August before any recruitment, but the collection running since August used the 3A build by mistake — it will be reported as a separately labelled 3A extension, and the decision now with my supervisor is whether to field v3.0 in a compressed window inside the ethics period or report the framework as specified but not yet field-tested. Owning this mix-up openly is better than the panel finding it.</a:t>
             </a:r>
             <a:endParaRPr lang="en-US" dirty="0"/>
           </a:p>
@@ -1303,7 +1303,7 @@
           <a:p>
             <a:r>
               <a:rPr lang="en-US" dirty="0"/>
-              <a:t>50 sec. Three beats against two clocks. The field window is already running and closes shortly; the real dependencies now are the analysis plan, the supervisor's Paper-3 venue decision, and the documentary records. The ethics expiry bounds fieldwork, not thesis submission.</a:t>
+              <a:t>50 sec. Three beats against two clocks. The load-bearing decision is the first one: whether to field v3.0 in a compressed window — it must open by late September to close inside the ethics period. Everything else proceeds either way; the thesis stands with §8.8 as a specified protocol if 3B is not fielded.</a:t>
             </a:r>
             <a:endParaRPr lang="en-US" dirty="0"/>
           </a:p>
@@ -3563,7 +3563,7 @@
                 <a:ea typeface="Calibri" pitchFamily="34" charset="-122"/>
                 <a:cs typeface="Calibri" pitchFamily="34" charset="-120"/>
               </a:rPr>
-              <a:t>Changes in cohort, setting, delivery and input modality across stages prevent causal isolation. Stage 3B — in the field since August 2026 — evaluates the combined adaptive design; it does not by itself isolate the framing contrast.</a:t>
+              <a:t>Changes in cohort, setting, delivery and input modality across stages prevent causal isolation. Stage 3B (build ready; fielding decision with the supervisor) is designed to evaluate the combined adaptive design; a further collection using the 3A build has run since August 2026.</a:t>
             </a:r>
             <a:endParaRPr lang="en-US" sz="1250" dirty="0"/>
           </a:p>
@@ -6840,7 +6840,7 @@
                 <a:ea typeface="Cambria" pitchFamily="34" charset="-122"/>
                 <a:cs typeface="Cambria" pitchFamily="34" charset="-120"/>
               </a:rPr>
-              <a:t>Stage 3B: in the field, nearing completion</a:t>
+              <a:t>Stage 3B: build ready — fielding decision pending</a:t>
             </a:r>
             <a:endParaRPr lang="en-US" sz="3100" dirty="0"/>
           </a:p>
@@ -6879,7 +6879,7 @@
                 <a:ea typeface="Calibri" pitchFamily="34" charset="-122"/>
                 <a:cs typeface="Calibri" pitchFamily="34" charset="-120"/>
               </a:rPr>
-              <a:t>Why Stage 3 split into 3A and 3B — and where 3B stands (running since August 2026)</a:t>
+              <a:t>Why Stage 3 split into 3A and 3B — and where 3B actually stands</a:t>
             </a:r>
             <a:endParaRPr lang="en-US" sz="1400" dirty="0"/>
           </a:p>
@@ -7137,7 +7137,7 @@
                 <a:ea typeface="Calibri" pitchFamily="34" charset="-122"/>
                 <a:cs typeface="Calibri" pitchFamily="34" charset="-120"/>
               </a:rPr>
-              <a:t>In the field since August 2026 (author-reported), nearing completion; the window closes inside the approved ethics period (to 30 Oct 2026). In-build consent; data arrive as one-file JSON exports, archived as-received.</a:t>
+              <a:t>The v3.0 build is complete and smoke-tested but NOT yet fielded. The collection running since August 2026 used the Stage-3A build — it cannot test H-3B and will be reported as a separately labelled 3A extension, never merged into the reported 3A record.</a:t>
             </a:r>
             <a:endParaRPr lang="en-US" sz="1250" dirty="0"/>
           </a:p>
@@ -7179,7 +7179,7 @@
                 <a:ea typeface="Calibri" pitchFamily="34" charset="-122"/>
                 <a:cs typeface="Calibri" pitchFamily="34" charset="-120"/>
               </a:rPr>
-              <a:t>Before analysis   </a:t>
+              <a:t>Decision   </a:t>
             </a:r>
             <a:pPr indent="0" marL="0">
               <a:lnSpc>
@@ -7196,7 +7196,7 @@
                 <a:ea typeface="Calibri" pitchFamily="34" charset="-122"/>
                 <a:cs typeface="Calibri" pitchFamily="34" charset="-120"/>
               </a:rPr>
-              <a:t>Analysis plan confirmed with the supervisor before the data are analysed: primary outcome (pre-specified in the protocol on 9 Aug 2026, before recruitment), missing-data handling, and treatment of early exits.</a:t>
+              <a:t>With the supervisor: field v3.0 in a compressed ~3–4-week window — still inside the ethics period if recruitment opens by late September (protocol Option B allows a single-arm variant) — or report the framework as designed and pre-specified but not yet field-tested.</a:t>
             </a:r>
             <a:endParaRPr lang="en-US" sz="1250" dirty="0"/>
           </a:p>
@@ -7303,7 +7303,7 @@
                 <a:ea typeface="Calibri" pitchFamily="34" charset="-122"/>
                 <a:cs typeface="Calibri" pitchFamily="34" charset="-120"/>
               </a:rPr>
-              <a:t>Prospectively evaluates the combined design intervention, with exploratory assessment of the proposed mechanisms</a:t>
+              <a:t>If fielded: prospectively evaluates the combined design intervention, with exploratory assessment of the proposed mechanisms</a:t>
             </a:r>
             <a:endParaRPr lang="en-US" sz="1250" dirty="0"/>
           </a:p>
@@ -7327,7 +7327,7 @@
                 <a:ea typeface="Calibri" pitchFamily="34" charset="-122"/>
                 <a:cs typeface="Calibri" pitchFamily="34" charset="-120"/>
               </a:rPr>
-              <a:t>§8.8 rewritten from proposed to first-evaluation-conducted</a:t>
+              <a:t>If fielded: §8.8 rewritten from proposed to first-evaluation-conducted; otherwise §8.8 stays a specified, unexecuted protocol</a:t>
             </a:r>
             <a:endParaRPr lang="en-US" sz="1250" dirty="0"/>
           </a:p>
@@ -7617,7 +7617,7 @@
                 <a:ea typeface="Calibri" pitchFamily="34" charset="-122"/>
                 <a:cs typeface="Calibri" pitchFamily="34" charset="-120"/>
               </a:rPr>
-              <a:t>Stage 3B (the critical path)</a:t>
+              <a:t>Stage 3B (decision + possible window)</a:t>
             </a:r>
             <a:endParaRPr lang="en-US" sz="1400" dirty="0"/>
           </a:p>
@@ -7663,7 +7663,7 @@
                 <a:ea typeface="Calibri" pitchFamily="34" charset="-122"/>
                 <a:cs typeface="Calibri" pitchFamily="34" charset="-120"/>
               </a:rPr>
-              <a:t>Window close and data cut-off; exports archived as-received</a:t>
+              <a:t>Fielding decision with supervisor — compressed v3.0 window still fits the ethics period if opened by late September</a:t>
             </a:r>
             <a:endParaRPr lang="en-US" sz="1150" dirty="0"/>
           </a:p>
@@ -7687,7 +7687,7 @@
                 <a:ea typeface="Calibri" pitchFamily="34" charset="-122"/>
                 <a:cs typeface="Calibri" pitchFamily="34" charset="-120"/>
               </a:rPr>
-              <a:t>Analysis plan fixed with supervisor, then analysis and interpretation → §8.8 + programme diary</a:t>
+              <a:t>August 3A-build collection: close out, document consent basis, archive exports as a separately labelled 3A extension</a:t>
             </a:r>
             <a:endParaRPr lang="en-US" sz="1150" dirty="0"/>
           </a:p>
@@ -8522,7 +8522,7 @@
                 <a:ea typeface="Calibri" pitchFamily="34" charset="-122"/>
                 <a:cs typeface="Calibri" pitchFamily="34" charset="-120"/>
               </a:rPr>
-              <a:t>Stage-3B window closes; data cut-off; exports archived</a:t>
+              <a:t>Supervisor decisions: field v3.0 3B (compressed window)? Paper-3 venue</a:t>
             </a:r>
             <a:endParaRPr lang="en-US" sz="1200" dirty="0"/>
           </a:p>
@@ -8546,7 +8546,7 @@
                 <a:ea typeface="Calibri" pitchFamily="34" charset="-122"/>
                 <a:cs typeface="Calibri" pitchFamily="34" charset="-120"/>
               </a:rPr>
-              <a:t>Analysis plan fixed with supervisor before analysis</a:t>
+              <a:t>August 3A-extension collection closed out and archived</a:t>
             </a:r>
             <a:endParaRPr lang="en-US" sz="1200" dirty="0"/>
           </a:p>
@@ -8759,7 +8759,7 @@
                 <a:ea typeface="Calibri" pitchFamily="34" charset="-122"/>
                 <a:cs typeface="Calibri" pitchFamily="34" charset="-120"/>
               </a:rPr>
-              <a:t>Stage-3B analysis → §8.8 + programme diary</a:t>
+              <a:t>If fielded: 3B window runs, closing before the ethics expiry</a:t>
             </a:r>
             <a:endParaRPr lang="en-US" sz="1200" dirty="0"/>
           </a:p>
@@ -8973,7 +8973,7 @@
                 <a:ea typeface="Calibri" pitchFamily="34" charset="-122"/>
                 <a:cs typeface="Calibri" pitchFamily="34" charset="-120"/>
               </a:rPr>
-              <a:t>Abstract rewrite; final sweeps; ToC/LoF/LoT fields</a:t>
+              <a:t>3B (or 3A-extension) write-up → §8.8 + programme diary</a:t>
             </a:r>
             <a:endParaRPr lang="en-US" sz="1200" dirty="0"/>
           </a:p>
@@ -8997,7 +8997,7 @@
                 <a:ea typeface="Calibri" pitchFamily="34" charset="-122"/>
                 <a:cs typeface="Calibri" pitchFamily="34" charset="-120"/>
               </a:rPr>
-              <a:t>Paper-3 submission on the supervisor's venue decision</a:t>
+              <a:t>Abstract rewrite; final sweeps; ToC/LoF/LoT fields; Paper-3 submission</a:t>
             </a:r>
             <a:endParaRPr lang="en-US" sz="1200" dirty="0"/>
           </a:p>
@@ -9082,7 +9082,7 @@
                 <a:ea typeface="Calibri" pitchFamily="34" charset="-122"/>
                 <a:cs typeface="Calibri" pitchFamily="34" charset="-120"/>
               </a:rPr>
-              <a:t>Two clocks: the ethics approval period ends 30 October 2026 and bounds Stage-3B fieldwork (the running window sits inside it); the thesis submission target is October 2026.</a:t>
+              <a:t>Two clocks: the ethics approval period ends 30 October 2026 — a compressed 3B window must open by late September; the thesis submission target is October 2026.</a:t>
             </a:r>
             <a:endParaRPr lang="en-US" sz="1300" dirty="0"/>
           </a:p>

--- a/docs/presentations/EngD_Update_8_Final_Review_September2026_revB.pptx
+++ b/docs/presentations/EngD_Update_8_Final_Review_September2026_revB.pptx
@@ -687,7 +687,7 @@
           <a:p>
             <a:r>
               <a:rPr lang="en-US" dirty="0"/>
-              <a:t>70 sec. Walk the three stages: the survey that surfaced the phenomenon; the eight-week gamified deployment; the decoupled deployment whose contrast motivates — but does not prove — the framing account. Note the defined Stage-3 endpoint: end-of-window participation, 112 of 120, returners counted as participating — not uninterrupted retention. If asked why Stage 3 has two parts: 3A tested removing the verdict; 3B tests measurement made survivable by design; separate labelled collections keep the reported 3A record untouched. Be upfront that the August collection used the 3A build and the 3B fielding decision is with the supervisor.</a:t>
+              <a:t>70 sec. Walk the three stages: the survey that surfaced the phenomenon; the eight-week gamified deployment; the decoupled deployment whose contrast motivates — but does not prove — the framing account. Note the defined Stage-3 endpoint: end-of-window participation, 112 of 120, returners counted as participating — not uninterrupted retention. If asked why Stage 3 has two parts: 3A tested removing the verdict; 3B tests measurement made survivable by design; separate labelled collections keep the reported 3A record untouched. On the August collection, state only what is verified: its classification follows what participants experienced and is being checked against the deployed file and returned records.</a:t>
             </a:r>
             <a:endParaRPr lang="en-US" dirty="0"/>
           </a:p>
@@ -1127,7 +1127,7 @@
           <a:p>
             <a:r>
               <a:rPr lang="en-US" dirty="0"/>
-              <a:t>75 sec. Open with the why: 3A removed the verdict and engagement survived — avoidance, not a solution; 3B reintroduces measurement made survivable by design. Then the honest status: the v3.0 build is ready and its primary outcome was pre-specified on 9 August before any recruitment, but the collection running since August used the 3A build by mistake — it will be reported as a separately labelled 3A extension, and the decision now with my supervisor is whether to field v3.0 in a compressed window inside the ethics period or report the framework as specified but not yet field-tested. Owning this mix-up openly is better than the panel finding it.</a:t>
+              <a:t>75 sec. Open with the why: 3A removed the verdict and engagement survived — avoidance, not a solution; 3B reintroduces measurement made survivable by design. Then the status, stated at its evidential level: the protocol and inferential hierarchy are repository-dated 8–9 August 2026; whether specification preceded recruitment awaits the deployment start date. I have reported that the August deployment used the earlier build; before fixing the stage label I am verifying the deployed file and returned records, because classification follows what participants experienced, not a version label. The decision tree on the slide covers both verification outcomes.</a:t>
             </a:r>
             <a:endParaRPr lang="en-US" dirty="0"/>
           </a:p>
@@ -1303,7 +1303,7 @@
           <a:p>
             <a:r>
               <a:rPr lang="en-US" dirty="0"/>
-              <a:t>50 sec. Three beats against two clocks. The load-bearing decision is the first one: whether to field v3.0 in a compressed window — it must open by late September to close inside the ethics period. Everything else proceeds either way; the thesis stands with §8.8 as a specified protocol if 3B is not fielded.</a:t>
+              <a:t>50 sec. Three beats against two clocks. The load-bearing step is verification of the August deployment, then the fielding decision — a compressed v3.0 window must open by late September to close inside the ethics period. Everything else proceeds either way; the thesis stands with §8.8 as a specified protocol if 3B is not fielded.</a:t>
             </a:r>
             <a:endParaRPr lang="en-US" dirty="0"/>
           </a:p>
@@ -3563,7 +3563,7 @@
                 <a:ea typeface="Calibri" pitchFamily="34" charset="-122"/>
                 <a:cs typeface="Calibri" pitchFamily="34" charset="-120"/>
               </a:rPr>
-              <a:t>Changes in cohort, setting, delivery and input modality across stages prevent causal isolation. Stage 3B (build ready; fielding decision with the supervisor) is designed to evaluate the combined adaptive design; a further collection using the 3A build has run since August 2026.</a:t>
+              <a:t>Changes in cohort, setting, delivery and input modality across stages prevent causal isolation. Stage 3B is designed to evaluate the combined adaptive design; the classification of the collection running since August 2026 is under verification (slide 7).</a:t>
             </a:r>
             <a:endParaRPr lang="en-US" sz="1250" dirty="0"/>
           </a:p>
@@ -6840,7 +6840,7 @@
                 <a:ea typeface="Cambria" pitchFamily="34" charset="-122"/>
                 <a:cs typeface="Cambria" pitchFamily="34" charset="-120"/>
               </a:rPr>
-              <a:t>Stage 3B: build ready — fielding decision pending</a:t>
+              <a:t>Stage 3B: status under verification</a:t>
             </a:r>
             <a:endParaRPr lang="en-US" sz="3100" dirty="0"/>
           </a:p>
@@ -7137,7 +7137,7 @@
                 <a:ea typeface="Calibri" pitchFamily="34" charset="-122"/>
                 <a:cs typeface="Calibri" pitchFamily="34" charset="-120"/>
               </a:rPr>
-              <a:t>The v3.0 build is complete and smoke-tested but NOT yet fielded. The collection running since August 2026 used the Stage-3A build — it cannot test H-3B and will be reported as a separately labelled 3A extension, never merged into the reported 3A record.</a:t>
+              <a:t>The author reports the August deployment used the earlier Stage-3A build. Classification follows what participants experienced — features, measurement display, allocation, outcomes — verified against the deployed file and returns before the label is fixed. Either way: a separately labelled collection, never merged.</a:t>
             </a:r>
             <a:endParaRPr lang="en-US" sz="1250" dirty="0"/>
           </a:p>
@@ -7196,7 +7196,7 @@
                 <a:ea typeface="Calibri" pitchFamily="34" charset="-122"/>
                 <a:cs typeface="Calibri" pitchFamily="34" charset="-120"/>
               </a:rPr>
-              <a:t>With the supervisor: field v3.0 in a compressed ~3–4-week window — still inside the ethics period if recruitment opens by late September (protocol Option B allows a single-arm variant) — or report the framework as designed and pre-specified but not yet field-tested.</a:t>
+              <a:t>If the 3A-build account is confirmed, with the supervisor: field v3.0 in a compressed ~3–4-week window inside the ethics period (the dated 8 Aug draft includes single-arm Option B), or report the framework as specified, not field-tested. If the deployment implemented the 3B procedures, it proceeds as the 3B evaluation.</a:t>
             </a:r>
             <a:endParaRPr lang="en-US" sz="1250" dirty="0"/>
           </a:p>
@@ -7617,7 +7617,7 @@
                 <a:ea typeface="Calibri" pitchFamily="34" charset="-122"/>
                 <a:cs typeface="Calibri" pitchFamily="34" charset="-120"/>
               </a:rPr>
-              <a:t>Stage 3B (decision + possible window)</a:t>
+              <a:t>Stage 3B (verify, then decide)</a:t>
             </a:r>
             <a:endParaRPr lang="en-US" sz="1400" dirty="0"/>
           </a:p>
@@ -7663,7 +7663,7 @@
                 <a:ea typeface="Calibri" pitchFamily="34" charset="-122"/>
                 <a:cs typeface="Calibri" pitchFamily="34" charset="-120"/>
               </a:rPr>
-              <a:t>Fielding decision with supervisor — compressed v3.0 window still fits the ethics period if opened by late September</a:t>
+              <a:t>Verify the August deployment: deployed file, participant experience, returns → fix the stage label</a:t>
             </a:r>
             <a:endParaRPr lang="en-US" sz="1150" dirty="0"/>
           </a:p>
@@ -7687,7 +7687,7 @@
                 <a:ea typeface="Calibri" pitchFamily="34" charset="-122"/>
                 <a:cs typeface="Calibri" pitchFamily="34" charset="-120"/>
               </a:rPr>
-              <a:t>August 3A-build collection: close out, document consent basis, archive exports as a separately labelled 3A extension</a:t>
+              <a:t>Then with the supervisor: compressed v3.0 window (fits the ethics period if opened by late September) or framework reported as specified, not field-tested</a:t>
             </a:r>
             <a:endParaRPr lang="en-US" sz="1150" dirty="0"/>
           </a:p>
@@ -8522,7 +8522,7 @@
                 <a:ea typeface="Calibri" pitchFamily="34" charset="-122"/>
                 <a:cs typeface="Calibri" pitchFamily="34" charset="-120"/>
               </a:rPr>
-              <a:t>Supervisor decisions: field v3.0 3B (compressed window)? Paper-3 venue</a:t>
+              <a:t>Verify the August deployment (deployed file, returns, start date) → classify</a:t>
             </a:r>
             <a:endParaRPr lang="en-US" sz="1200" dirty="0"/>
           </a:p>
@@ -8546,7 +8546,7 @@
                 <a:ea typeface="Calibri" pitchFamily="34" charset="-122"/>
                 <a:cs typeface="Calibri" pitchFamily="34" charset="-120"/>
               </a:rPr>
-              <a:t>August 3A-extension collection closed out and archived</a:t>
+              <a:t>Supervisor decisions: 3B fielding; Paper-3 venue</a:t>
             </a:r>
             <a:endParaRPr lang="en-US" sz="1200" dirty="0"/>
           </a:p>

--- a/docs/presentations/EngD_Update_8_Final_Review_September2026_revB.pptx
+++ b/docs/presentations/EngD_Update_8_Final_Review_September2026_revB.pptx
@@ -687,7 +687,7 @@
           <a:p>
             <a:r>
               <a:rPr lang="en-US" dirty="0"/>
-              <a:t>70 sec. Walk the three stages: the survey that surfaced the phenomenon; the eight-week gamified deployment; the decoupled deployment whose contrast motivates — but does not prove — the framing account. Note the defined Stage-3 endpoint: end-of-window participation, 112 of 120, returners counted as participating — not uninterrupted retention. If asked why Stage 3 has two parts: 3A tested removing the verdict; 3B tests measurement made survivable by design; separate labelled collections keep the reported 3A record untouched. On the August collection, state only what is verified: its classification follows what participants experienced and is being checked against the deployed file and returned records.</a:t>
+              <a:t>70 sec. Walk the three stages: the survey that surfaced the phenomenon; the eight-week gamified deployment; the decoupled deployment whose contrast motivates — but does not prove — the framing account. Note the defined Stage-3 endpoint: end-of-window participation, 112 of 120, returners counted as participating — not uninterrupted retention. If asked why Stage 3 has two parts: 3A tested removing the verdict; 3B tests measurement made survivable by design; separate labelled collections keep the reported 3A record untouched. On Stage 3B, state only the interim account: collection commenced in August 2026; deployed procedures and returns are being checked against the protocol before classification and analysis.</a:t>
             </a:r>
             <a:endParaRPr lang="en-US" dirty="0"/>
           </a:p>
@@ -1127,7 +1127,7 @@
           <a:p>
             <a:r>
               <a:rPr lang="en-US" dirty="0"/>
-              <a:t>75 sec. Open with the why: 3A removed the verdict and engagement survived — avoidance, not a solution; 3B reintroduces measurement made survivable by design. Then the status, stated at its evidential level: the protocol and inferential hierarchy are repository-dated 8–9 August 2026; whether specification preceded recruitment awaits the deployment start date. I have reported that the August deployment used the earlier build; before fixing the stage label I am verifying the deployed file and returned records, because classification follows what participants experienced, not a version label. The decision tree on the slide covers both verification outcomes.</a:t>
+              <a:t>75 sec. Give the panel the essentials: the two-part rationale; the research question H-3B; what participants experience under the dated protocol; that collection commenced in August 2026; and that deployed procedures and returns are being checked against the protocol before classification and analysis. Do not speculate about causes or versions. Contingency plans are supervisor matters — mention only if asked.</a:t>
             </a:r>
             <a:endParaRPr lang="en-US" dirty="0"/>
           </a:p>
@@ -1215,7 +1215,7 @@
           <a:p>
             <a:r>
               <a:rPr lang="en-US" dirty="0"/>
-              <a:t>80 sec. The honest gap slide. Say plainly which items are substantive rather than administrative: instrument confirmation can affect interpretation of the questionnaire data; Stage-3B recruitment and results are real dependencies; the non-return evidential-basis sweep aligns thesis and papers with what the archive supports. Invite the panel to add anything they consider missing.</a:t>
+              <a:t>80 sec. The honest gap slide. Say plainly which items are substantive rather than administrative: instrument confirmation can affect interpretation of the questionnaire data; Stage-3B recruitment and results are real dependencies; the non-return evidential-basis sweep aligns thesis and papers with what the archive supports. Invite the panel to add anything they consider missing. Contingency routes are not the plan of record — the August deployment is.</a:t>
             </a:r>
             <a:endParaRPr lang="en-US" dirty="0"/>
           </a:p>
@@ -1303,7 +1303,7 @@
           <a:p>
             <a:r>
               <a:rPr lang="en-US" dirty="0"/>
-              <a:t>50 sec. Three beats against two clocks. The load-bearing step is verification of the August deployment, then the fielding decision — a compressed v3.0 window must open by late September to close inside the ethics period. Everything else proceeds either way; the thesis stands with §8.8 as a specified protocol if 3B is not fielded.</a:t>
+              <a:t>50 sec. Three beats against two clocks. The load-bearing step is verification of the August deployment, then analysis under the pre-specified hierarchy. Any contingency fieldwork is bounded by the ethics expiry and is a supervisor matter.</a:t>
             </a:r>
             <a:endParaRPr lang="en-US" dirty="0"/>
           </a:p>
@@ -2394,7 +2394,7 @@
                 <a:ea typeface="Calibri" pitchFamily="34" charset="-122"/>
                 <a:cs typeface="Calibri" pitchFamily="34" charset="-120"/>
               </a:rPr>
-              <a:t>An engineering response (under evaluation)</a:t>
+              <a:t>An engineering response (evaluation in progress)</a:t>
             </a:r>
             <a:endParaRPr lang="en-US" sz="1450" dirty="0"/>
           </a:p>
@@ -2414,7 +2414,7 @@
                 <a:ea typeface="Calibri" pitchFamily="34" charset="-122"/>
                 <a:cs typeface="Calibri" pitchFamily="34" charset="-120"/>
               </a:rPr>
-              <a:t>Three design principles, each tracing a documented field problem to a specific design decision, embodied in the adaptive-learning framework. Its combined-effect evaluation is contingent on Stage 3B.</a:t>
+              <a:t>Three design principles, each tracing a documented field problem to a specific design decision, embodied in the adaptive-learning framework. Evaluation status follows the verified classification of the August Stage-3B deployment.</a:t>
             </a:r>
             <a:endParaRPr lang="en-US" sz="1450" dirty="0"/>
           </a:p>
@@ -2478,7 +2478,7 @@
                 <a:ea typeface="Calibri" pitchFamily="34" charset="-122"/>
                 <a:cs typeface="Calibri" pitchFamily="34" charset="-120"/>
               </a:rPr>
-              <a:t>A reproducible record (completed)</a:t>
+              <a:t>A reproducible record (assembly continuing)</a:t>
             </a:r>
             <a:endParaRPr lang="en-US" sz="1450" dirty="0"/>
           </a:p>
@@ -2498,7 +2498,7 @@
                 <a:ea typeface="Calibri" pitchFamily="34" charset="-122"/>
                 <a:cs typeface="Calibri" pitchFamily="34" charset="-120"/>
               </a:rPr>
-              <a:t>As-received archives, recalculated statistics (arithmetic verification), calibrated language — an evidential chain an examiner can walk end to end.</a:t>
+              <a:t>As-received archives, recalculated statistics (arithmetic verification), calibrated language — an evidential chain an examiner can walk end to end, with the remaining documentary items on slide 8 being filed.</a:t>
             </a:r>
             <a:endParaRPr lang="en-US" sz="1450" dirty="0"/>
           </a:p>
@@ -3563,7 +3563,7 @@
                 <a:ea typeface="Calibri" pitchFamily="34" charset="-122"/>
                 <a:cs typeface="Calibri" pitchFamily="34" charset="-120"/>
               </a:rPr>
-              <a:t>Changes in cohort, setting, delivery and input modality across stages prevent causal isolation. Stage 3B is designed to evaluate the combined adaptive design; the classification of the collection running since August 2026 is under verification (slide 7).</a:t>
+              <a:t>Changes in cohort, setting, delivery and input modality across stages prevent causal isolation. Stage 3B data collection commenced in August 2026; deployed procedures and returned records are being checked against the Stage-3B protocol before final classification and analysis (slide 7).</a:t>
             </a:r>
             <a:endParaRPr lang="en-US" sz="1250" dirty="0"/>
           </a:p>
@@ -4215,7 +4215,7 @@
                 <a:ea typeface="Calibri" pitchFamily="34" charset="-122"/>
                 <a:cs typeface="Calibri" pitchFamily="34" charset="-120"/>
               </a:rPr>
-              <a:t>“before” = standard-mode FRA assessment at first attendance; “after” = the index generated at the final attended gameplay episode (timing varies by participant; an index is produced even with few completed runs). This is not an eight-week pre/post assessment design.</a:t>
+              <a:t>“before” = standard-mode FRA assessment at first attendance; “after” = the index generated at the final attended gameplay episode (timing varies by participant; an index is produced even with few completed runs). Both values are the same index on the same scale (higher = better); the standard-mode vs gameplay context difference is a stated limitation. Not an eight-week pre/post design.</a:t>
             </a:r>
             <a:endParaRPr lang="en-US" sz="1300" dirty="0"/>
           </a:p>
@@ -4335,7 +4335,7 @@
                 <a:ea typeface="Calibri" pitchFamily="34" charset="-122"/>
                 <a:cs typeface="Calibri" pitchFamily="34" charset="-120"/>
               </a:rPr>
-              <a:t>The ≤3 / ≥4 run split is a descriptive, retrospectively formalised classification anchored to the protocol's three-to-five-play lower bound — not an optimal threshold.</a:t>
+              <a:t>The ≤3 / ≥4 run split is a retrospectively defined classification used for descriptive analysis — not an optimal threshold.</a:t>
             </a:r>
             <a:endParaRPr lang="en-US" sz="1200" dirty="0"/>
           </a:p>
@@ -5294,7 +5294,7 @@
                 <a:ea typeface="Calibri" pitchFamily="34" charset="-122"/>
                 <a:cs typeface="Calibri" pitchFamily="34" charset="-120"/>
               </a:rPr>
-              <a:t>HSEARS20260805008 approved 6 Aug 2026 (PI Prof. Cheung); stated approval period 16 Jun 2024 – 30 Oct 2026. Approval post-dates the Stage-1/2 fieldwork and was obtained with the conducted procedures disclosed; the Stage-3B window falls inside the period. Memo archived.</a:t>
+              <a:t>HSEARS20260805008 approved 6 Aug 2026 (PI Prof. Cheung); stated approval period 16 Jun 2024 – 30 Oct 2026. Approval post-dates the Stage-1/2 fieldwork and was obtained with the conducted procedures disclosed; the Stage-3B window falls inside the period. Memo archived; available for panel inspection.</a:t>
             </a:r>
             <a:endParaRPr lang="en-US" sz="1300" dirty="0"/>
           </a:p>
@@ -5580,7 +5580,7 @@
                 <a:ea typeface="Calibri" pitchFamily="34" charset="-122"/>
                 <a:cs typeface="Calibri" pitchFamily="34" charset="-120"/>
               </a:rPr>
-              <a:t>FRA logbook with stable player IDs; questionnaire entry workbook; nine-interview record (therapist-conducted, Aug–Sep 2025, self-selected acceptors); sensitivity analysis recalculated from the archive (arithmetic verification, n=30 vs n=29).</a:t>
+              <a:t>FRA logbook with stable player IDs; questionnaire entry workbook; nine-interview record (therapist-conducted, Aug–Sep 2025, self-selected acceptors — per the archived logbook and workbook; paper forms being collected); sensitivity analysis recalculated from the archive (arithmetic verification, n=30 vs n=29).</a:t>
             </a:r>
             <a:endParaRPr lang="en-US" sz="1300" dirty="0"/>
           </a:p>
@@ -6840,7 +6840,7 @@
                 <a:ea typeface="Cambria" pitchFamily="34" charset="-122"/>
                 <a:cs typeface="Cambria" pitchFamily="34" charset="-120"/>
               </a:rPr>
-              <a:t>Stage 3B: status under verification</a:t>
+              <a:t>Stage 3B: deployment under verification</a:t>
             </a:r>
             <a:endParaRPr lang="en-US" sz="3100" dirty="0"/>
           </a:p>
@@ -6879,7 +6879,7 @@
                 <a:ea typeface="Calibri" pitchFamily="34" charset="-122"/>
                 <a:cs typeface="Calibri" pitchFamily="34" charset="-120"/>
               </a:rPr>
-              <a:t>Why Stage 3 split into 3A and 3B — and where 3B actually stands</a:t>
+              <a:t>Why Stage 3 has two parts, what participants experience, and where the data stand</a:t>
             </a:r>
             <a:endParaRPr lang="en-US" sz="1400" dirty="0"/>
           </a:p>
@@ -7002,7 +7002,7 @@
                 <a:ea typeface="Calibri" pitchFamily="34" charset="-122"/>
                 <a:cs typeface="Calibri" pitchFamily="34" charset="-120"/>
               </a:rPr>
-              <a:t>Why a separate stage   </a:t>
+              <a:t>Two parts, two questions   </a:t>
             </a:r>
             <a:pPr indent="0" marL="0">
               <a:lnSpc>
@@ -7019,7 +7019,7 @@
                 <a:ea typeface="Calibri" pitchFamily="34" charset="-122"/>
                 <a:cs typeface="Calibri" pitchFamily="34" charset="-120"/>
               </a:rPr>
-              <a:t>Stage 3A removed the clinical verdict and engagement survived — avoidance, not a solution. Stage 3B reintroduces gentle, trajectory-framed measurement to test whether the Chapter 7 design makes measurement survivable — a separately labelled collection, so the reported 3A record is never touched.</a:t>
+              <a:t>Stage 3A examined engagement when the clinical verdict was removed from play. Stage 3B examines whether trajectory-framed measurement with adaptive support sustains engagement when measurement is visible. Separate labelled collections; the reported 3A record is unchanged.</a:t>
             </a:r>
             <a:endParaRPr lang="en-US" sz="1250" dirty="0"/>
           </a:p>
@@ -7061,7 +7061,7 @@
                 <a:ea typeface="Calibri" pitchFamily="34" charset="-122"/>
                 <a:cs typeface="Calibri" pitchFamily="34" charset="-120"/>
               </a:rPr>
-              <a:t>Design   </a:t>
+              <a:t>Per-protocol participant experience   </a:t>
             </a:r>
             <a:pPr indent="0" marL="0">
               <a:lnSpc>
@@ -7078,7 +7078,7 @@
                 <a:ea typeface="Calibri" pitchFamily="34" charset="-122"/>
                 <a:cs typeface="Calibri" pitchFamily="34" charset="-120"/>
               </a:rPr>
-              <a:t>Exploratory two-arm randomised comparison (adaptive rule-agent + trajectory + coaching vs static difficulty), silently assigned in the v3.0 bilingual build; target N ≥ 40. Estimates the combined effect — no component or framing isolation.</a:t>
+              <a:t>The bilingual v3.0 game: in-build consent, silent random assignment (adaptive calibration + trajectory + coaching vs static difficulty), end-screen questionnaire, one-file export; target N ≥ 40. Estimates the combined effect — no component or framing isolation.</a:t>
             </a:r>
             <a:endParaRPr lang="en-US" sz="1250" dirty="0"/>
           </a:p>
@@ -7137,7 +7137,7 @@
                 <a:ea typeface="Calibri" pitchFamily="34" charset="-122"/>
                 <a:cs typeface="Calibri" pitchFamily="34" charset="-120"/>
               </a:rPr>
-              <a:t>The author reports the August deployment used the earlier Stage-3A build. Classification follows what participants experienced — features, measurement display, allocation, outcomes — verified against the deployed file and returns before the label is fixed. Either way: a separately labelled collection, never merged.</a:t>
+              <a:t>Data collection commenced in August 2026. The deployed procedures and returned records are being checked against the Stage-3B protocol before final classification and analysis.</a:t>
             </a:r>
             <a:endParaRPr lang="en-US" sz="1250" dirty="0"/>
           </a:p>
@@ -7179,7 +7179,7 @@
                 <a:ea typeface="Calibri" pitchFamily="34" charset="-122"/>
                 <a:cs typeface="Calibri" pitchFamily="34" charset="-120"/>
               </a:rPr>
-              <a:t>Decision   </a:t>
+              <a:t>Next   </a:t>
             </a:r>
             <a:pPr indent="0" marL="0">
               <a:lnSpc>
@@ -7196,7 +7196,7 @@
                 <a:ea typeface="Calibri" pitchFamily="34" charset="-122"/>
                 <a:cs typeface="Calibri" pitchFamily="34" charset="-120"/>
               </a:rPr>
-              <a:t>If the 3A-build account is confirmed, with the supervisor: field v3.0 in a compressed ~3–4-week window inside the ethics period (the dated 8 Aug draft includes single-arm Option B), or report the framework as specified, not field-tested. If the deployment implemented the 3B procedures, it proceeds as the 3B evaluation.</a:t>
+              <a:t>Verification → classification → analysis under the pre-specified hierarchy (repository-dated 8–9 Aug 2026). Contingencies arise only if verification does not support the 3B classification and rest with the supervisor; a single-arm route would provide no between-group estimate, so objective and claims would be revised accordingly.</a:t>
             </a:r>
             <a:endParaRPr lang="en-US" sz="1250" dirty="0"/>
           </a:p>
@@ -7303,7 +7303,7 @@
                 <a:ea typeface="Calibri" pitchFamily="34" charset="-122"/>
                 <a:cs typeface="Calibri" pitchFamily="34" charset="-120"/>
               </a:rPr>
-              <a:t>If fielded: prospectively evaluates the combined design intervention, with exploratory assessment of the proposed mechanisms</a:t>
+              <a:t>The combined-intervention evaluation, with exploratory assessment of the proposed mechanisms</a:t>
             </a:r>
             <a:endParaRPr lang="en-US" sz="1250" dirty="0"/>
           </a:p>
@@ -7327,31 +7327,7 @@
                 <a:ea typeface="Calibri" pitchFamily="34" charset="-122"/>
                 <a:cs typeface="Calibri" pitchFamily="34" charset="-120"/>
               </a:rPr>
-              <a:t>If fielded: §8.8 rewritten from proposed to first-evaluation-conducted; otherwise §8.8 stays a specified, unexecuted protocol</a:t>
-            </a:r>
-            <a:endParaRPr lang="en-US" sz="1250" dirty="0"/>
-          </a:p>
-          <a:p>
-            <a:pPr marL="342900" indent="-342900">
-              <a:lnSpc>
-                <a:spcPct val="108000"/>
-              </a:lnSpc>
-              <a:spcAft>
-                <a:spcPts val="1000"/>
-              </a:spcAft>
-              <a:buSzPct val="100000"/>
-              <a:buChar char="•"/>
-            </a:pPr>
-            <a:r>
-              <a:rPr lang="en-US" sz="1250" dirty="0">
-                <a:solidFill>
-                  <a:srgbClr val="222222"/>
-                </a:solidFill>
-                <a:latin typeface="Calibri" pitchFamily="34" charset="0"/>
-                <a:ea typeface="Calibri" pitchFamily="34" charset="-122"/>
-                <a:cs typeface="Calibri" pitchFamily="34" charset="-120"/>
-              </a:rPr>
-              <a:t>Programme diary (Table 9.1) final cells</a:t>
+              <a:t>§8.8 and the programme diary (Table 9.1), written to the verified classification</a:t>
             </a:r>
             <a:endParaRPr lang="en-US" sz="1250" dirty="0"/>
           </a:p>
@@ -7617,7 +7593,7 @@
                 <a:ea typeface="Calibri" pitchFamily="34" charset="-122"/>
                 <a:cs typeface="Calibri" pitchFamily="34" charset="-120"/>
               </a:rPr>
-              <a:t>Stage 3B (verify, then decide)</a:t>
+              <a:t>Stage 3B (verify, then analyse)</a:t>
             </a:r>
             <a:endParaRPr lang="en-US" sz="1400" dirty="0"/>
           </a:p>
@@ -7663,7 +7639,7 @@
                 <a:ea typeface="Calibri" pitchFamily="34" charset="-122"/>
                 <a:cs typeface="Calibri" pitchFamily="34" charset="-120"/>
               </a:rPr>
-              <a:t>Verify the August deployment: deployed file, participant experience, returns → fix the stage label</a:t>
+              <a:t>Verify deployed procedures and returns against the protocol → classify</a:t>
             </a:r>
             <a:endParaRPr lang="en-US" sz="1150" dirty="0"/>
           </a:p>
@@ -7687,7 +7663,31 @@
                 <a:ea typeface="Calibri" pitchFamily="34" charset="-122"/>
                 <a:cs typeface="Calibri" pitchFamily="34" charset="-120"/>
               </a:rPr>
-              <a:t>Then with the supervisor: compressed v3.0 window (fits the ethics period if opened by late September) or framework reported as specified, not field-tested</a:t>
+              <a:t>Default: complete and analyse the August deployment as Stage 3B under the pre-specified hierarchy</a:t>
+            </a:r>
+            <a:endParaRPr lang="en-US" sz="1150" dirty="0"/>
+          </a:p>
+          <a:p>
+            <a:pPr marL="342900" indent="-342900">
+              <a:lnSpc>
+                <a:spcPct val="104000"/>
+              </a:lnSpc>
+              <a:spcAft>
+                <a:spcPts val="600"/>
+              </a:spcAft>
+              <a:buSzPct val="100000"/>
+              <a:buChar char="•"/>
+            </a:pPr>
+            <a:r>
+              <a:rPr lang="en-US" sz="1150" dirty="0">
+                <a:solidFill>
+                  <a:srgbClr val="222222"/>
+                </a:solidFill>
+                <a:latin typeface="Calibri" pitchFamily="34" charset="0"/>
+                <a:ea typeface="Calibri" pitchFamily="34" charset="-122"/>
+                <a:cs typeface="Calibri" pitchFamily="34" charset="-120"/>
+              </a:rPr>
+              <a:t>Contingencies only if verification does not support that classification (supervisor)</a:t>
             </a:r>
             <a:endParaRPr lang="en-US" sz="1150" dirty="0"/>
           </a:p>
@@ -8546,7 +8546,7 @@
                 <a:ea typeface="Calibri" pitchFamily="34" charset="-122"/>
                 <a:cs typeface="Calibri" pitchFamily="34" charset="-120"/>
               </a:rPr>
-              <a:t>Supervisor decisions: 3B fielding; Paper-3 venue</a:t>
+              <a:t>Supervisor items: Paper-3 venue; any contingency</a:t>
             </a:r>
             <a:endParaRPr lang="en-US" sz="1200" dirty="0"/>
           </a:p>
@@ -8759,7 +8759,7 @@
                 <a:ea typeface="Calibri" pitchFamily="34" charset="-122"/>
                 <a:cs typeface="Calibri" pitchFamily="34" charset="-120"/>
               </a:rPr>
-              <a:t>If fielded: 3B window runs, closing before the ethics expiry</a:t>
+              <a:t>Stage-3B analysis under the pre-specified hierarchy → §8.8 + diary</a:t>
             </a:r>
             <a:endParaRPr lang="en-US" sz="1200" dirty="0"/>
           </a:p>
@@ -8973,7 +8973,7 @@
                 <a:ea typeface="Calibri" pitchFamily="34" charset="-122"/>
                 <a:cs typeface="Calibri" pitchFamily="34" charset="-120"/>
               </a:rPr>
-              <a:t>3B (or 3A-extension) write-up → §8.8 + programme diary</a:t>
+              <a:t>Stage-3B write-up finalised to the verified classification</a:t>
             </a:r>
             <a:endParaRPr lang="en-US" sz="1200" dirty="0"/>
           </a:p>
@@ -9082,7 +9082,7 @@
                 <a:ea typeface="Calibri" pitchFamily="34" charset="-122"/>
                 <a:cs typeface="Calibri" pitchFamily="34" charset="-120"/>
               </a:rPr>
-              <a:t>Two clocks: the ethics approval period ends 30 October 2026 — a compressed 3B window must open by late September; the thesis submission target is October 2026.</a:t>
+              <a:t>Two clocks: the ethics approval period ends 30 October 2026 and bounds any further fieldwork; the thesis submission target is October 2026.</a:t>
             </a:r>
             <a:endParaRPr lang="en-US" sz="1300" dirty="0"/>
           </a:p>

--- a/docs/presentations/EngD_Update_8_Final_Review_September2026_revB.pptx
+++ b/docs/presentations/EngD_Update_8_Final_Review_September2026_revB.pptx
@@ -1127,7 +1127,7 @@
           <a:p>
             <a:r>
               <a:rPr lang="en-US" dirty="0"/>
-              <a:t>75 sec. Give the panel the essentials: the two-part rationale; the research question H-3B; what participants experience under the dated protocol; that collection commenced in August 2026; and that deployed procedures and returns are being checked against the protocol before classification and analysis. Do not speculate about causes or versions. Contingency plans are supervisor matters — mention only if asked.</a:t>
+              <a:t>75 sec. Deliver three beats: (1) collection COMMENCED IN AUGUST 2026; (2) the INTENDED COMPARISON — adaptive calibration + trajectory + coaching vs static difficulty, randomised in-build, estimating the combined effect; (3) STATUS — deployed procedures and returns are being checked against the protocol before classification and analysis. If asked about contingencies: they arise only if verification does not support the 3B classification and rest with my supervisor; a single-arm route would provide no between-group estimate, so objective and claims would be revised accordingly.</a:t>
             </a:r>
             <a:endParaRPr lang="en-US" dirty="0"/>
           </a:p>
@@ -7196,7 +7196,7 @@
                 <a:ea typeface="Calibri" pitchFamily="34" charset="-122"/>
                 <a:cs typeface="Calibri" pitchFamily="34" charset="-120"/>
               </a:rPr>
-              <a:t>Verification → classification → analysis under the pre-specified hierarchy (repository-dated 8–9 Aug 2026). Contingencies arise only if verification does not support the 3B classification and rest with the supervisor; a single-arm route would provide no between-group estimate, so objective and claims would be revised accordingly.</a:t>
+              <a:t>Verification of the deployed file and returns → classification → analysis under the pre-specified hierarchy (repository-dated 8–9 Aug 2026).</a:t>
             </a:r>
             <a:endParaRPr lang="en-US" sz="1250" dirty="0"/>
           </a:p>
